--- a/class/cloud_infra_mgmt/07주차_Kubernetes핵심3/01_강의자료/1차시_Ingress개념_배포용.pptx
+++ b/class/cloud_infra_mgmt/07주차_Kubernetes핵심3/01_강의자료/1차시_Ingress개념_배포용.pptx
@@ -4509,15 +4509,6 @@
               </a:lnSpc>
             </a:pPr>
             <a:r>
-              <a:rPr sz="2000" b="1">
-                <a:solidFill>
-                  <a:srgbClr val="0D9488"/>
-                </a:solidFill>
-                <a:latin typeface="맑은 고딕"/>
-              </a:rPr>
-              <a:t>●  </a:t>
-            </a:r>
-            <a:r>
               <a:rPr sz="2000" b="0">
                 <a:solidFill>
                   <a:srgbClr val="222733"/>
@@ -4534,15 +4525,6 @@
               </a:lnSpc>
             </a:pPr>
             <a:r>
-              <a:rPr sz="2000" b="1">
-                <a:solidFill>
-                  <a:srgbClr val="0D9488"/>
-                </a:solidFill>
-                <a:latin typeface="맑은 고딕"/>
-              </a:rPr>
-              <a:t>●  </a:t>
-            </a:r>
-            <a:r>
               <a:rPr sz="2000" b="0">
                 <a:solidFill>
                   <a:srgbClr val="222733"/>
@@ -4558,15 +4540,6 @@
                 <a:spcPct val="115000"/>
               </a:lnSpc>
             </a:pPr>
-            <a:r>
-              <a:rPr sz="2000" b="1">
-                <a:solidFill>
-                  <a:srgbClr val="0D9488"/>
-                </a:solidFill>
-                <a:latin typeface="맑은 고딕"/>
-              </a:rPr>
-              <a:t>●  </a:t>
-            </a:r>
             <a:r>
               <a:rPr sz="2000" b="0">
                 <a:solidFill>
@@ -4877,54 +4850,8 @@
         </p:nvSpPr>
         <p:spPr>
           <a:xfrm>
-            <a:off x="1177747" y="1828800"/>
-            <a:ext cx="2048256" cy="3108960"/>
-          </a:xfrm>
-          <a:prstGeom prst="rect">
-            <a:avLst/>
-          </a:prstGeom>
-          <a:solidFill>
-            <a:srgbClr val="FFFFFF"/>
-          </a:solidFill>
-          <a:ln>
-            <a:solidFill>
-              <a:srgbClr val="FFFFFF"/>
-            </a:solidFill>
-          </a:ln>
-          <a:effectLst/>
-        </p:spPr>
-        <p:style>
-          <a:lnRef idx="1">
-            <a:schemeClr val="accent1"/>
-          </a:lnRef>
-          <a:fillRef idx="3">
-            <a:schemeClr val="accent1"/>
-          </a:fillRef>
-          <a:effectRef idx="2">
-            <a:schemeClr val="accent1"/>
-          </a:effectRef>
-          <a:fontRef idx="minor">
-            <a:schemeClr val="lt1"/>
-          </a:fontRef>
-        </p:style>
-        <p:txBody>
-          <a:bodyPr rtlCol="0" anchor="ctr"/>
-          <a:lstStyle/>
-          <a:p>
-            <a:pPr algn="ctr"/>
-          </a:p>
-        </p:txBody>
-      </p:sp>
-      <p:sp>
-        <p:nvSpPr>
-          <p:cNvPr id="7" name="Rectangle 6"/>
-          <p:cNvSpPr/>
-          <p:nvPr/>
-        </p:nvSpPr>
-        <p:spPr>
-          <a:xfrm>
-            <a:off x="1177747" y="1828800"/>
-            <a:ext cx="2048256" cy="109728"/>
+            <a:off x="2571292" y="1730959"/>
+            <a:ext cx="1995220" cy="31089"/>
           </a:xfrm>
           <a:prstGeom prst="rect">
             <a:avLst/>
@@ -4961,86 +4888,16 @@
       </p:sp>
       <p:sp>
         <p:nvSpPr>
-          <p:cNvPr id="8" name="TextBox 7"/>
-          <p:cNvSpPr txBox="1"/>
-          <p:nvPr/>
-        </p:nvSpPr>
-        <p:spPr>
-          <a:xfrm>
-            <a:off x="1314907" y="2148840"/>
-            <a:ext cx="1773936" cy="640080"/>
-          </a:xfrm>
-          <a:prstGeom prst="rect">
-            <a:avLst/>
-          </a:prstGeom>
-          <a:noFill/>
-        </p:spPr>
-        <p:txBody>
-          <a:bodyPr wrap="square">
-            <a:spAutoFit/>
-          </a:bodyPr>
-          <a:lstStyle/>
-          <a:p>
-            <a:pPr algn="l"/>
-            <a:r>
-              <a:rPr sz="1500" b="1">
-                <a:solidFill>
-                  <a:srgbClr val="14213D"/>
-                </a:solidFill>
-                <a:latin typeface="맑은 고딕"/>
-              </a:rPr>
-              <a:t>① 개념 설명</a:t>
-            </a:r>
-          </a:p>
-        </p:txBody>
-      </p:sp>
-      <p:sp>
-        <p:nvSpPr>
-          <p:cNvPr id="9" name="TextBox 8"/>
-          <p:cNvSpPr txBox="1"/>
-          <p:nvPr/>
-        </p:nvSpPr>
-        <p:spPr>
-          <a:xfrm>
-            <a:off x="1314907" y="2834640"/>
-            <a:ext cx="1773936" cy="1188720"/>
-          </a:xfrm>
-          <a:prstGeom prst="rect">
-            <a:avLst/>
-          </a:prstGeom>
-          <a:noFill/>
-        </p:spPr>
-        <p:txBody>
-          <a:bodyPr wrap="square">
-            <a:spAutoFit/>
-          </a:bodyPr>
-          <a:lstStyle/>
-          <a:p>
-            <a:pPr algn="l"/>
-            <a:r>
-              <a:rPr sz="1200" b="0">
-                <a:solidFill>
-                  <a:srgbClr val="222733"/>
-                </a:solidFill>
-                <a:latin typeface="맑은 고딕"/>
-              </a:rPr>
-              <a:t>강의자료 기반 직접 강의</a:t>
-            </a:r>
-          </a:p>
-        </p:txBody>
-      </p:sp>
-      <p:sp>
-        <p:nvSpPr>
-          <p:cNvPr id="10" name="Rectangle 9"/>
+          <p:cNvPr id="7" name="Isosceles Triangle 6"/>
           <p:cNvSpPr/>
           <p:nvPr/>
         </p:nvSpPr>
         <p:spPr>
-          <a:xfrm>
-            <a:off x="3430828" y="3273552"/>
-            <a:ext cx="128016" cy="219456"/>
-          </a:xfrm>
-          <a:prstGeom prst="rect">
+          <a:xfrm rot="5400000">
+            <a:off x="3495751" y="1673352"/>
+            <a:ext cx="146304" cy="146304"/>
+          </a:xfrm>
+          <a:prstGeom prst="triangle">
             <a:avLst/>
           </a:prstGeom>
           <a:solidFill>
@@ -5075,60 +4932,14 @@
       </p:sp>
       <p:sp>
         <p:nvSpPr>
-          <p:cNvPr id="11" name="Rectangle 10"/>
+          <p:cNvPr id="8" name="Rectangle 7"/>
           <p:cNvSpPr/>
           <p:nvPr/>
         </p:nvSpPr>
         <p:spPr>
           <a:xfrm>
-            <a:off x="3763670" y="1828800"/>
-            <a:ext cx="2048256" cy="3108960"/>
-          </a:xfrm>
-          <a:prstGeom prst="rect">
-            <a:avLst/>
-          </a:prstGeom>
-          <a:solidFill>
-            <a:srgbClr val="FFFFFF"/>
-          </a:solidFill>
-          <a:ln>
-            <a:solidFill>
-              <a:srgbClr val="FFFFFF"/>
-            </a:solidFill>
-          </a:ln>
-          <a:effectLst/>
-        </p:spPr>
-        <p:style>
-          <a:lnRef idx="1">
-            <a:schemeClr val="accent1"/>
-          </a:lnRef>
-          <a:fillRef idx="3">
-            <a:schemeClr val="accent1"/>
-          </a:fillRef>
-          <a:effectRef idx="2">
-            <a:schemeClr val="accent1"/>
-          </a:effectRef>
-          <a:fontRef idx="minor">
-            <a:schemeClr val="lt1"/>
-          </a:fontRef>
-        </p:style>
-        <p:txBody>
-          <a:bodyPr rtlCol="0" anchor="ctr"/>
-          <a:lstStyle/>
-          <a:p>
-            <a:pPr algn="ctr"/>
-          </a:p>
-        </p:txBody>
-      </p:sp>
-      <p:sp>
-        <p:nvSpPr>
-          <p:cNvPr id="12" name="Rectangle 11"/>
-          <p:cNvSpPr/>
-          <p:nvPr/>
-        </p:nvSpPr>
-        <p:spPr>
-          <a:xfrm>
-            <a:off x="3763670" y="1828800"/>
-            <a:ext cx="2048256" cy="109728"/>
+            <a:off x="5096865" y="1730959"/>
+            <a:ext cx="1995220" cy="31089"/>
           </a:xfrm>
           <a:prstGeom prst="rect">
             <a:avLst/>
@@ -5165,86 +4976,16 @@
       </p:sp>
       <p:sp>
         <p:nvSpPr>
-          <p:cNvPr id="13" name="TextBox 12"/>
-          <p:cNvSpPr txBox="1"/>
-          <p:nvPr/>
-        </p:nvSpPr>
-        <p:spPr>
-          <a:xfrm>
-            <a:off x="3900830" y="2148840"/>
-            <a:ext cx="1773936" cy="640080"/>
-          </a:xfrm>
-          <a:prstGeom prst="rect">
-            <a:avLst/>
-          </a:prstGeom>
-          <a:noFill/>
-        </p:spPr>
-        <p:txBody>
-          <a:bodyPr wrap="square">
-            <a:spAutoFit/>
-          </a:bodyPr>
-          <a:lstStyle/>
-          <a:p>
-            <a:pPr algn="l"/>
-            <a:r>
-              <a:rPr sz="1500" b="1">
-                <a:solidFill>
-                  <a:srgbClr val="14213D"/>
-                </a:solidFill>
-                <a:latin typeface="맑은 고딕"/>
-              </a:rPr>
-              <a:t>② Killercoda</a:t>
-            </a:r>
-          </a:p>
-        </p:txBody>
-      </p:sp>
-      <p:sp>
-        <p:nvSpPr>
-          <p:cNvPr id="14" name="TextBox 13"/>
-          <p:cNvSpPr txBox="1"/>
-          <p:nvPr/>
-        </p:nvSpPr>
-        <p:spPr>
-          <a:xfrm>
-            <a:off x="3900830" y="2834640"/>
-            <a:ext cx="1773936" cy="1188720"/>
-          </a:xfrm>
-          <a:prstGeom prst="rect">
-            <a:avLst/>
-          </a:prstGeom>
-          <a:noFill/>
-        </p:spPr>
-        <p:txBody>
-          <a:bodyPr wrap="square">
-            <a:spAutoFit/>
-          </a:bodyPr>
-          <a:lstStyle/>
-          <a:p>
-            <a:pPr algn="l"/>
-            <a:r>
-              <a:rPr sz="1200" b="0">
-                <a:solidFill>
-                  <a:srgbClr val="222733"/>
-                </a:solidFill>
-                <a:latin typeface="맑은 고딕"/>
-              </a:rPr>
-              <a:t>Ingress 존재 확인·구조 탐색</a:t>
-            </a:r>
-          </a:p>
-        </p:txBody>
-      </p:sp>
-      <p:sp>
-        <p:nvSpPr>
-          <p:cNvPr id="15" name="Rectangle 14"/>
+          <p:cNvPr id="9" name="Isosceles Triangle 8"/>
           <p:cNvSpPr/>
           <p:nvPr/>
         </p:nvSpPr>
         <p:spPr>
-          <a:xfrm>
-            <a:off x="6016751" y="3273552"/>
-            <a:ext cx="128016" cy="219456"/>
-          </a:xfrm>
-          <a:prstGeom prst="rect">
+          <a:xfrm rot="5400000">
+            <a:off x="6021324" y="1673352"/>
+            <a:ext cx="146304" cy="146304"/>
+          </a:xfrm>
+          <a:prstGeom prst="triangle">
             <a:avLst/>
           </a:prstGeom>
           <a:solidFill>
@@ -5279,60 +5020,14 @@
       </p:sp>
       <p:sp>
         <p:nvSpPr>
-          <p:cNvPr id="16" name="Rectangle 15"/>
+          <p:cNvPr id="10" name="Rectangle 9"/>
           <p:cNvSpPr/>
           <p:nvPr/>
         </p:nvSpPr>
         <p:spPr>
           <a:xfrm>
-            <a:off x="6349593" y="1828800"/>
-            <a:ext cx="2048256" cy="3108960"/>
-          </a:xfrm>
-          <a:prstGeom prst="rect">
-            <a:avLst/>
-          </a:prstGeom>
-          <a:solidFill>
-            <a:srgbClr val="FFFFFF"/>
-          </a:solidFill>
-          <a:ln>
-            <a:solidFill>
-              <a:srgbClr val="FFFFFF"/>
-            </a:solidFill>
-          </a:ln>
-          <a:effectLst/>
-        </p:spPr>
-        <p:style>
-          <a:lnRef idx="1">
-            <a:schemeClr val="accent1"/>
-          </a:lnRef>
-          <a:fillRef idx="3">
-            <a:schemeClr val="accent1"/>
-          </a:fillRef>
-          <a:effectRef idx="2">
-            <a:schemeClr val="accent1"/>
-          </a:effectRef>
-          <a:fontRef idx="minor">
-            <a:schemeClr val="lt1"/>
-          </a:fontRef>
-        </p:style>
-        <p:txBody>
-          <a:bodyPr rtlCol="0" anchor="ctr"/>
-          <a:lstStyle/>
-          <a:p>
-            <a:pPr algn="ctr"/>
-          </a:p>
-        </p:txBody>
-      </p:sp>
-      <p:sp>
-        <p:nvSpPr>
-          <p:cNvPr id="17" name="Rectangle 16"/>
-          <p:cNvSpPr/>
-          <p:nvPr/>
-        </p:nvSpPr>
-        <p:spPr>
-          <a:xfrm>
-            <a:off x="6349593" y="1828800"/>
-            <a:ext cx="2048256" cy="109728"/>
+            <a:off x="7622438" y="1730959"/>
+            <a:ext cx="1995220" cy="31089"/>
           </a:xfrm>
           <a:prstGeom prst="rect">
             <a:avLst/>
@@ -5369,86 +5064,16 @@
       </p:sp>
       <p:sp>
         <p:nvSpPr>
-          <p:cNvPr id="18" name="TextBox 17"/>
-          <p:cNvSpPr txBox="1"/>
-          <p:nvPr/>
-        </p:nvSpPr>
-        <p:spPr>
-          <a:xfrm>
-            <a:off x="6486753" y="2148840"/>
-            <a:ext cx="1773936" cy="640080"/>
-          </a:xfrm>
-          <a:prstGeom prst="rect">
-            <a:avLst/>
-          </a:prstGeom>
-          <a:noFill/>
-        </p:spPr>
-        <p:txBody>
-          <a:bodyPr wrap="square">
-            <a:spAutoFit/>
-          </a:bodyPr>
-          <a:lstStyle/>
-          <a:p>
-            <a:pPr algn="l"/>
-            <a:r>
-              <a:rPr sz="1500" b="1">
-                <a:solidFill>
-                  <a:srgbClr val="14213D"/>
-                </a:solidFill>
-                <a:latin typeface="맑은 고딕"/>
-              </a:rPr>
-              <a:t>③ VM 안내</a:t>
-            </a:r>
-          </a:p>
-        </p:txBody>
-      </p:sp>
-      <p:sp>
-        <p:nvSpPr>
-          <p:cNvPr id="19" name="TextBox 18"/>
-          <p:cNvSpPr txBox="1"/>
-          <p:nvPr/>
-        </p:nvSpPr>
-        <p:spPr>
-          <a:xfrm>
-            <a:off x="6486753" y="2834640"/>
-            <a:ext cx="1773936" cy="1188720"/>
-          </a:xfrm>
-          <a:prstGeom prst="rect">
-            <a:avLst/>
-          </a:prstGeom>
-          <a:noFill/>
-        </p:spPr>
-        <p:txBody>
-          <a:bodyPr wrap="square">
-            <a:spAutoFit/>
-          </a:bodyPr>
-          <a:lstStyle/>
-          <a:p>
-            <a:pPr algn="l"/>
-            <a:r>
-              <a:rPr sz="1200" b="0">
-                <a:solidFill>
-                  <a:srgbClr val="222733"/>
-                </a:solidFill>
-                <a:latin typeface="맑은 고딕"/>
-              </a:rPr>
-              <a:t>VM 환경 사전 점검</a:t>
-            </a:r>
-          </a:p>
-        </p:txBody>
-      </p:sp>
-      <p:sp>
-        <p:nvSpPr>
-          <p:cNvPr id="20" name="Rectangle 19"/>
+          <p:cNvPr id="11" name="Isosceles Triangle 10"/>
           <p:cNvSpPr/>
           <p:nvPr/>
         </p:nvSpPr>
         <p:spPr>
-          <a:xfrm>
-            <a:off x="8602675" y="3273552"/>
-            <a:ext cx="128016" cy="219456"/>
-          </a:xfrm>
-          <a:prstGeom prst="rect">
+          <a:xfrm rot="5400000">
+            <a:off x="8546896" y="1673352"/>
+            <a:ext cx="146304" cy="146304"/>
+          </a:xfrm>
+          <a:prstGeom prst="triangle">
             <a:avLst/>
           </a:prstGeom>
           <a:solidFill>
@@ -5483,25 +5108,23 @@
       </p:sp>
       <p:sp>
         <p:nvSpPr>
-          <p:cNvPr id="21" name="Rectangle 20"/>
+          <p:cNvPr id="12" name="Oval 11"/>
           <p:cNvSpPr/>
           <p:nvPr/>
         </p:nvSpPr>
         <p:spPr>
           <a:xfrm>
-            <a:off x="8935516" y="1828800"/>
-            <a:ext cx="2048256" cy="3108960"/>
-          </a:xfrm>
-          <a:prstGeom prst="rect">
+            <a:off x="2040940" y="1481328"/>
+            <a:ext cx="530352" cy="530352"/>
+          </a:xfrm>
+          <a:prstGeom prst="ellipse">
             <a:avLst/>
           </a:prstGeom>
           <a:solidFill>
-            <a:srgbClr val="FFFFFF"/>
+            <a:srgbClr val="0D9488"/>
           </a:solidFill>
           <a:ln>
-            <a:solidFill>
-              <a:srgbClr val="FFFFFF"/>
-            </a:solidFill>
+            <a:noFill/>
           </a:ln>
           <a:effectLst/>
         </p:spPr>
@@ -5529,20 +5152,177 @@
       </p:sp>
       <p:sp>
         <p:nvSpPr>
-          <p:cNvPr id="22" name="Rectangle 21"/>
+          <p:cNvPr id="13" name="TextBox 12"/>
+          <p:cNvSpPr txBox="1"/>
+          <p:nvPr/>
+        </p:nvSpPr>
+        <p:spPr>
+          <a:xfrm>
+            <a:off x="2040940" y="1481328"/>
+            <a:ext cx="530352" cy="530352"/>
+          </a:xfrm>
+          <a:prstGeom prst="rect">
+            <a:avLst/>
+          </a:prstGeom>
+          <a:noFill/>
+        </p:spPr>
+        <p:txBody>
+          <a:bodyPr wrap="square" anchor="ctr">
+            <a:spAutoFit/>
+          </a:bodyPr>
+          <a:lstStyle/>
+          <a:p>
+            <a:pPr algn="ctr"/>
+            <a:r>
+              <a:rPr sz="1600" b="1">
+                <a:solidFill>
+                  <a:srgbClr val="FFFFFF"/>
+                </a:solidFill>
+                <a:latin typeface="맑은 고딕"/>
+              </a:rPr>
+              <a:t>1</a:t>
+            </a:r>
+          </a:p>
+        </p:txBody>
+      </p:sp>
+      <p:sp>
+        <p:nvSpPr>
+          <p:cNvPr id="14" name="Rounded Rectangle 13"/>
           <p:cNvSpPr/>
           <p:nvPr/>
         </p:nvSpPr>
         <p:spPr>
           <a:xfrm>
-            <a:off x="8935516" y="1828800"/>
-            <a:ext cx="2048256" cy="109728"/>
-          </a:xfrm>
-          <a:prstGeom prst="rect">
-            <a:avLst/>
+            <a:off x="1263700" y="2304288"/>
+            <a:ext cx="2084831" cy="2880360"/>
+          </a:xfrm>
+          <a:prstGeom prst="roundRect">
+            <a:avLst>
+              <a:gd name="adj" fmla="val 6000"/>
+            </a:avLst>
           </a:prstGeom>
           <a:solidFill>
-            <a:srgbClr val="14B8A6"/>
+            <a:srgbClr val="FFFFFF"/>
+          </a:solidFill>
+          <a:ln w="12700">
+            <a:solidFill>
+              <a:srgbClr val="E3E7EE"/>
+            </a:solidFill>
+          </a:ln>
+          <a:effectLst/>
+        </p:spPr>
+        <p:style>
+          <a:lnRef idx="1">
+            <a:schemeClr val="accent1"/>
+          </a:lnRef>
+          <a:fillRef idx="3">
+            <a:schemeClr val="accent1"/>
+          </a:fillRef>
+          <a:effectRef idx="2">
+            <a:schemeClr val="accent1"/>
+          </a:effectRef>
+          <a:fontRef idx="minor">
+            <a:schemeClr val="lt1"/>
+          </a:fontRef>
+        </p:style>
+        <p:txBody>
+          <a:bodyPr rtlCol="0" anchor="ctr"/>
+          <a:lstStyle/>
+          <a:p>
+            <a:pPr algn="ctr"/>
+          </a:p>
+        </p:txBody>
+      </p:sp>
+      <p:sp>
+        <p:nvSpPr>
+          <p:cNvPr id="15" name="TextBox 14"/>
+          <p:cNvSpPr txBox="1"/>
+          <p:nvPr/>
+        </p:nvSpPr>
+        <p:spPr>
+          <a:xfrm>
+            <a:off x="1428292" y="2487168"/>
+            <a:ext cx="1755648" cy="548640"/>
+          </a:xfrm>
+          <a:prstGeom prst="rect">
+            <a:avLst/>
+          </a:prstGeom>
+          <a:noFill/>
+        </p:spPr>
+        <p:txBody>
+          <a:bodyPr wrap="square">
+            <a:spAutoFit/>
+          </a:bodyPr>
+          <a:lstStyle/>
+          <a:p>
+            <a:pPr algn="l"/>
+            <a:r>
+              <a:rPr sz="1500" b="1">
+                <a:solidFill>
+                  <a:srgbClr val="14213D"/>
+                </a:solidFill>
+                <a:latin typeface="맑은 고딕"/>
+              </a:rPr>
+              <a:t>개념 설명</a:t>
+            </a:r>
+          </a:p>
+        </p:txBody>
+      </p:sp>
+      <p:sp>
+        <p:nvSpPr>
+          <p:cNvPr id="16" name="TextBox 15"/>
+          <p:cNvSpPr txBox="1"/>
+          <p:nvPr/>
+        </p:nvSpPr>
+        <p:spPr>
+          <a:xfrm>
+            <a:off x="1428292" y="3081528"/>
+            <a:ext cx="1755648" cy="1965960"/>
+          </a:xfrm>
+          <a:prstGeom prst="rect">
+            <a:avLst/>
+          </a:prstGeom>
+          <a:noFill/>
+        </p:spPr>
+        <p:txBody>
+          <a:bodyPr wrap="square">
+            <a:spAutoFit/>
+          </a:bodyPr>
+          <a:lstStyle/>
+          <a:p>
+            <a:pPr algn="l">
+              <a:lnSpc>
+                <a:spcPct val="115000"/>
+              </a:lnSpc>
+            </a:pPr>
+            <a:r>
+              <a:rPr sz="1200" b="0">
+                <a:solidFill>
+                  <a:srgbClr val="222733"/>
+                </a:solidFill>
+                <a:latin typeface="맑은 고딕"/>
+              </a:rPr>
+              <a:t>강의자료 기반 직접 강의</a:t>
+            </a:r>
+          </a:p>
+        </p:txBody>
+      </p:sp>
+      <p:sp>
+        <p:nvSpPr>
+          <p:cNvPr id="17" name="Oval 16"/>
+          <p:cNvSpPr/>
+          <p:nvPr/>
+        </p:nvSpPr>
+        <p:spPr>
+          <a:xfrm>
+            <a:off x="4566513" y="1481328"/>
+            <a:ext cx="530352" cy="530352"/>
+          </a:xfrm>
+          <a:prstGeom prst="ellipse">
+            <a:avLst/>
+          </a:prstGeom>
+          <a:solidFill>
+            <a:srgbClr val="0D9488"/>
           </a:solidFill>
           <a:ln>
             <a:noFill/>
@@ -5573,14 +5353,97 @@
       </p:sp>
       <p:sp>
         <p:nvSpPr>
-          <p:cNvPr id="23" name="TextBox 22"/>
+          <p:cNvPr id="18" name="TextBox 17"/>
           <p:cNvSpPr txBox="1"/>
           <p:nvPr/>
         </p:nvSpPr>
         <p:spPr>
           <a:xfrm>
-            <a:off x="9072676" y="2148840"/>
-            <a:ext cx="1773936" cy="640080"/>
+            <a:off x="4566513" y="1481328"/>
+            <a:ext cx="530352" cy="530352"/>
+          </a:xfrm>
+          <a:prstGeom prst="rect">
+            <a:avLst/>
+          </a:prstGeom>
+          <a:noFill/>
+        </p:spPr>
+        <p:txBody>
+          <a:bodyPr wrap="square" anchor="ctr">
+            <a:spAutoFit/>
+          </a:bodyPr>
+          <a:lstStyle/>
+          <a:p>
+            <a:pPr algn="ctr"/>
+            <a:r>
+              <a:rPr sz="1600" b="1">
+                <a:solidFill>
+                  <a:srgbClr val="FFFFFF"/>
+                </a:solidFill>
+                <a:latin typeface="맑은 고딕"/>
+              </a:rPr>
+              <a:t>2</a:t>
+            </a:r>
+          </a:p>
+        </p:txBody>
+      </p:sp>
+      <p:sp>
+        <p:nvSpPr>
+          <p:cNvPr id="19" name="Rounded Rectangle 18"/>
+          <p:cNvSpPr/>
+          <p:nvPr/>
+        </p:nvSpPr>
+        <p:spPr>
+          <a:xfrm>
+            <a:off x="3789273" y="2304288"/>
+            <a:ext cx="2084831" cy="2880360"/>
+          </a:xfrm>
+          <a:prstGeom prst="roundRect">
+            <a:avLst>
+              <a:gd name="adj" fmla="val 6000"/>
+            </a:avLst>
+          </a:prstGeom>
+          <a:solidFill>
+            <a:srgbClr val="FFFFFF"/>
+          </a:solidFill>
+          <a:ln w="12700">
+            <a:solidFill>
+              <a:srgbClr val="E3E7EE"/>
+            </a:solidFill>
+          </a:ln>
+          <a:effectLst/>
+        </p:spPr>
+        <p:style>
+          <a:lnRef idx="1">
+            <a:schemeClr val="accent1"/>
+          </a:lnRef>
+          <a:fillRef idx="3">
+            <a:schemeClr val="accent1"/>
+          </a:fillRef>
+          <a:effectRef idx="2">
+            <a:schemeClr val="accent1"/>
+          </a:effectRef>
+          <a:fontRef idx="minor">
+            <a:schemeClr val="lt1"/>
+          </a:fontRef>
+        </p:style>
+        <p:txBody>
+          <a:bodyPr rtlCol="0" anchor="ctr"/>
+          <a:lstStyle/>
+          <a:p>
+            <a:pPr algn="ctr"/>
+          </a:p>
+        </p:txBody>
+      </p:sp>
+      <p:sp>
+        <p:nvSpPr>
+          <p:cNvPr id="20" name="TextBox 19"/>
+          <p:cNvSpPr txBox="1"/>
+          <p:nvPr/>
+        </p:nvSpPr>
+        <p:spPr>
+          <a:xfrm>
+            <a:off x="3953865" y="2487168"/>
+            <a:ext cx="1755648" cy="548640"/>
           </a:xfrm>
           <a:prstGeom prst="rect">
             <a:avLst/>
@@ -5601,21 +5464,21 @@
                 </a:solidFill>
                 <a:latin typeface="맑은 고딕"/>
               </a:rPr>
-              <a:t>④ 결과 제출</a:t>
-            </a:r>
-          </a:p>
-        </p:txBody>
-      </p:sp>
-      <p:sp>
-        <p:nvSpPr>
-          <p:cNvPr id="24" name="TextBox 23"/>
+              <a:t>Killercoda</a:t>
+            </a:r>
+          </a:p>
+        </p:txBody>
+      </p:sp>
+      <p:sp>
+        <p:nvSpPr>
+          <p:cNvPr id="21" name="TextBox 20"/>
           <p:cNvSpPr txBox="1"/>
           <p:nvPr/>
         </p:nvSpPr>
         <p:spPr>
           <a:xfrm>
-            <a:off x="9072676" y="2834640"/>
-            <a:ext cx="1773936" cy="1188720"/>
+            <a:off x="3953865" y="3081528"/>
+            <a:ext cx="1755648" cy="1965960"/>
           </a:xfrm>
           <a:prstGeom prst="rect">
             <a:avLst/>
@@ -5628,7 +5491,11 @@
           </a:bodyPr>
           <a:lstStyle/>
           <a:p>
-            <a:pPr algn="l"/>
+            <a:pPr algn="l">
+              <a:lnSpc>
+                <a:spcPct val="115000"/>
+              </a:lnSpc>
+            </a:pPr>
             <a:r>
               <a:rPr sz="1200" b="0">
                 <a:solidFill>
@@ -5636,8 +5503,135 @@
                 </a:solidFill>
                 <a:latin typeface="맑은 고딕"/>
               </a:rPr>
-              <a:t>체크리스트 제출</a:t>
-            </a:r>
+              <a:t>Ingress 존재 확인·구조 탐색</a:t>
+            </a:r>
+          </a:p>
+        </p:txBody>
+      </p:sp>
+      <p:sp>
+        <p:nvSpPr>
+          <p:cNvPr id="22" name="Oval 21"/>
+          <p:cNvSpPr/>
+          <p:nvPr/>
+        </p:nvSpPr>
+        <p:spPr>
+          <a:xfrm>
+            <a:off x="7092086" y="1481328"/>
+            <a:ext cx="530352" cy="530352"/>
+          </a:xfrm>
+          <a:prstGeom prst="ellipse">
+            <a:avLst/>
+          </a:prstGeom>
+          <a:solidFill>
+            <a:srgbClr val="0D9488"/>
+          </a:solidFill>
+          <a:ln>
+            <a:noFill/>
+          </a:ln>
+          <a:effectLst/>
+        </p:spPr>
+        <p:style>
+          <a:lnRef idx="1">
+            <a:schemeClr val="accent1"/>
+          </a:lnRef>
+          <a:fillRef idx="3">
+            <a:schemeClr val="accent1"/>
+          </a:fillRef>
+          <a:effectRef idx="2">
+            <a:schemeClr val="accent1"/>
+          </a:effectRef>
+          <a:fontRef idx="minor">
+            <a:schemeClr val="lt1"/>
+          </a:fontRef>
+        </p:style>
+        <p:txBody>
+          <a:bodyPr rtlCol="0" anchor="ctr"/>
+          <a:lstStyle/>
+          <a:p>
+            <a:pPr algn="ctr"/>
+          </a:p>
+        </p:txBody>
+      </p:sp>
+      <p:sp>
+        <p:nvSpPr>
+          <p:cNvPr id="23" name="TextBox 22"/>
+          <p:cNvSpPr txBox="1"/>
+          <p:nvPr/>
+        </p:nvSpPr>
+        <p:spPr>
+          <a:xfrm>
+            <a:off x="7092086" y="1481328"/>
+            <a:ext cx="530352" cy="530352"/>
+          </a:xfrm>
+          <a:prstGeom prst="rect">
+            <a:avLst/>
+          </a:prstGeom>
+          <a:noFill/>
+        </p:spPr>
+        <p:txBody>
+          <a:bodyPr wrap="square" anchor="ctr">
+            <a:spAutoFit/>
+          </a:bodyPr>
+          <a:lstStyle/>
+          <a:p>
+            <a:pPr algn="ctr"/>
+            <a:r>
+              <a:rPr sz="1600" b="1">
+                <a:solidFill>
+                  <a:srgbClr val="FFFFFF"/>
+                </a:solidFill>
+                <a:latin typeface="맑은 고딕"/>
+              </a:rPr>
+              <a:t>3</a:t>
+            </a:r>
+          </a:p>
+        </p:txBody>
+      </p:sp>
+      <p:sp>
+        <p:nvSpPr>
+          <p:cNvPr id="24" name="Rounded Rectangle 23"/>
+          <p:cNvSpPr/>
+          <p:nvPr/>
+        </p:nvSpPr>
+        <p:spPr>
+          <a:xfrm>
+            <a:off x="6314846" y="2304288"/>
+            <a:ext cx="2084831" cy="2880360"/>
+          </a:xfrm>
+          <a:prstGeom prst="roundRect">
+            <a:avLst>
+              <a:gd name="adj" fmla="val 6000"/>
+            </a:avLst>
+          </a:prstGeom>
+          <a:solidFill>
+            <a:srgbClr val="FFFFFF"/>
+          </a:solidFill>
+          <a:ln w="12700">
+            <a:solidFill>
+              <a:srgbClr val="E3E7EE"/>
+            </a:solidFill>
+          </a:ln>
+          <a:effectLst/>
+        </p:spPr>
+        <p:style>
+          <a:lnRef idx="1">
+            <a:schemeClr val="accent1"/>
+          </a:lnRef>
+          <a:fillRef idx="3">
+            <a:schemeClr val="accent1"/>
+          </a:fillRef>
+          <a:effectRef idx="2">
+            <a:schemeClr val="accent1"/>
+          </a:effectRef>
+          <a:fontRef idx="minor">
+            <a:schemeClr val="lt1"/>
+          </a:fontRef>
+        </p:style>
+        <p:txBody>
+          <a:bodyPr rtlCol="0" anchor="ctr"/>
+          <a:lstStyle/>
+          <a:p>
+            <a:pPr algn="ctr"/>
           </a:p>
         </p:txBody>
       </p:sp>
@@ -5649,8 +5643,8 @@
         </p:nvSpPr>
         <p:spPr>
           <a:xfrm>
-            <a:off x="457200" y="6528816"/>
-            <a:ext cx="7315200" cy="274320"/>
+            <a:off x="6479438" y="2487168"/>
+            <a:ext cx="1755648" cy="548640"/>
           </a:xfrm>
           <a:prstGeom prst="rect">
             <a:avLst/>
@@ -5665,13 +5659,13 @@
           <a:p>
             <a:pPr algn="l"/>
             <a:r>
-              <a:rPr sz="900" b="0">
-                <a:solidFill>
-                  <a:srgbClr val="5B6373"/>
-                </a:solidFill>
-                <a:latin typeface="맑은 고딕"/>
-              </a:rPr>
-              <a:t>클라우드인프라관리  ·  7주차 1차시</a:t>
+              <a:rPr sz="1500" b="1">
+                <a:solidFill>
+                  <a:srgbClr val="14213D"/>
+                </a:solidFill>
+                <a:latin typeface="맑은 고딕"/>
+              </a:rPr>
+              <a:t>VM 안내</a:t>
             </a:r>
           </a:p>
         </p:txBody>
@@ -5684,8 +5678,8 @@
         </p:nvSpPr>
         <p:spPr>
           <a:xfrm>
-            <a:off x="10607040" y="6528816"/>
-            <a:ext cx="1188720" cy="274320"/>
+            <a:off x="6479438" y="3081528"/>
+            <a:ext cx="1755648" cy="1965960"/>
           </a:xfrm>
           <a:prstGeom prst="rect">
             <a:avLst/>
@@ -5698,14 +5692,289 @@
           </a:bodyPr>
           <a:lstStyle/>
           <a:p>
+            <a:pPr algn="l">
+              <a:lnSpc>
+                <a:spcPct val="115000"/>
+              </a:lnSpc>
+            </a:pPr>
+            <a:r>
+              <a:rPr sz="1200" b="0">
+                <a:solidFill>
+                  <a:srgbClr val="222733"/>
+                </a:solidFill>
+                <a:latin typeface="맑은 고딕"/>
+              </a:rPr>
+              <a:t>VM 환경 사전 점검</a:t>
+            </a:r>
+          </a:p>
+        </p:txBody>
+      </p:sp>
+      <p:sp>
+        <p:nvSpPr>
+          <p:cNvPr id="27" name="Oval 26"/>
+          <p:cNvSpPr/>
+          <p:nvPr/>
+        </p:nvSpPr>
+        <p:spPr>
+          <a:xfrm>
+            <a:off x="9617659" y="1481328"/>
+            <a:ext cx="530352" cy="530352"/>
+          </a:xfrm>
+          <a:prstGeom prst="ellipse">
+            <a:avLst/>
+          </a:prstGeom>
+          <a:solidFill>
+            <a:srgbClr val="0D9488"/>
+          </a:solidFill>
+          <a:ln>
+            <a:noFill/>
+          </a:ln>
+          <a:effectLst/>
+        </p:spPr>
+        <p:style>
+          <a:lnRef idx="1">
+            <a:schemeClr val="accent1"/>
+          </a:lnRef>
+          <a:fillRef idx="3">
+            <a:schemeClr val="accent1"/>
+          </a:fillRef>
+          <a:effectRef idx="2">
+            <a:schemeClr val="accent1"/>
+          </a:effectRef>
+          <a:fontRef idx="minor">
+            <a:schemeClr val="lt1"/>
+          </a:fontRef>
+        </p:style>
+        <p:txBody>
+          <a:bodyPr rtlCol="0" anchor="ctr"/>
+          <a:lstStyle/>
+          <a:p>
+            <a:pPr algn="ctr"/>
+          </a:p>
+        </p:txBody>
+      </p:sp>
+      <p:sp>
+        <p:nvSpPr>
+          <p:cNvPr id="28" name="TextBox 27"/>
+          <p:cNvSpPr txBox="1"/>
+          <p:nvPr/>
+        </p:nvSpPr>
+        <p:spPr>
+          <a:xfrm>
+            <a:off x="9617659" y="1481328"/>
+            <a:ext cx="530352" cy="530352"/>
+          </a:xfrm>
+          <a:prstGeom prst="rect">
+            <a:avLst/>
+          </a:prstGeom>
+          <a:noFill/>
+        </p:spPr>
+        <p:txBody>
+          <a:bodyPr wrap="square" anchor="ctr">
+            <a:spAutoFit/>
+          </a:bodyPr>
+          <a:lstStyle/>
+          <a:p>
+            <a:pPr algn="ctr"/>
+            <a:r>
+              <a:rPr sz="1600" b="1">
+                <a:solidFill>
+                  <a:srgbClr val="FFFFFF"/>
+                </a:solidFill>
+                <a:latin typeface="맑은 고딕"/>
+              </a:rPr>
+              <a:t>4</a:t>
+            </a:r>
+          </a:p>
+        </p:txBody>
+      </p:sp>
+      <p:sp>
+        <p:nvSpPr>
+          <p:cNvPr id="29" name="Rounded Rectangle 28"/>
+          <p:cNvSpPr/>
+          <p:nvPr/>
+        </p:nvSpPr>
+        <p:spPr>
+          <a:xfrm>
+            <a:off x="8840419" y="2304288"/>
+            <a:ext cx="2084831" cy="2880360"/>
+          </a:xfrm>
+          <a:prstGeom prst="roundRect">
+            <a:avLst>
+              <a:gd name="adj" fmla="val 6000"/>
+            </a:avLst>
+          </a:prstGeom>
+          <a:solidFill>
+            <a:srgbClr val="FFFFFF"/>
+          </a:solidFill>
+          <a:ln w="12700">
+            <a:solidFill>
+              <a:srgbClr val="E3E7EE"/>
+            </a:solidFill>
+          </a:ln>
+          <a:effectLst/>
+        </p:spPr>
+        <p:style>
+          <a:lnRef idx="1">
+            <a:schemeClr val="accent1"/>
+          </a:lnRef>
+          <a:fillRef idx="3">
+            <a:schemeClr val="accent1"/>
+          </a:fillRef>
+          <a:effectRef idx="2">
+            <a:schemeClr val="accent1"/>
+          </a:effectRef>
+          <a:fontRef idx="minor">
+            <a:schemeClr val="lt1"/>
+          </a:fontRef>
+        </p:style>
+        <p:txBody>
+          <a:bodyPr rtlCol="0" anchor="ctr"/>
+          <a:lstStyle/>
+          <a:p>
+            <a:pPr algn="ctr"/>
+          </a:p>
+        </p:txBody>
+      </p:sp>
+      <p:sp>
+        <p:nvSpPr>
+          <p:cNvPr id="30" name="TextBox 29"/>
+          <p:cNvSpPr txBox="1"/>
+          <p:nvPr/>
+        </p:nvSpPr>
+        <p:spPr>
+          <a:xfrm>
+            <a:off x="9005011" y="2487168"/>
+            <a:ext cx="1755648" cy="548640"/>
+          </a:xfrm>
+          <a:prstGeom prst="rect">
+            <a:avLst/>
+          </a:prstGeom>
+          <a:noFill/>
+        </p:spPr>
+        <p:txBody>
+          <a:bodyPr wrap="square">
+            <a:spAutoFit/>
+          </a:bodyPr>
+          <a:lstStyle/>
+          <a:p>
             <a:pPr algn="l"/>
             <a:r>
+              <a:rPr sz="1500" b="1">
+                <a:solidFill>
+                  <a:srgbClr val="14213D"/>
+                </a:solidFill>
+                <a:latin typeface="맑은 고딕"/>
+              </a:rPr>
+              <a:t>결과 제출</a:t>
+            </a:r>
+          </a:p>
+        </p:txBody>
+      </p:sp>
+      <p:sp>
+        <p:nvSpPr>
+          <p:cNvPr id="31" name="TextBox 30"/>
+          <p:cNvSpPr txBox="1"/>
+          <p:nvPr/>
+        </p:nvSpPr>
+        <p:spPr>
+          <a:xfrm>
+            <a:off x="9005011" y="3081528"/>
+            <a:ext cx="1755648" cy="1965960"/>
+          </a:xfrm>
+          <a:prstGeom prst="rect">
+            <a:avLst/>
+          </a:prstGeom>
+          <a:noFill/>
+        </p:spPr>
+        <p:txBody>
+          <a:bodyPr wrap="square">
+            <a:spAutoFit/>
+          </a:bodyPr>
+          <a:lstStyle/>
+          <a:p>
+            <a:pPr algn="l">
+              <a:lnSpc>
+                <a:spcPct val="115000"/>
+              </a:lnSpc>
+            </a:pPr>
+            <a:r>
+              <a:rPr sz="1200" b="0">
+                <a:solidFill>
+                  <a:srgbClr val="222733"/>
+                </a:solidFill>
+                <a:latin typeface="맑은 고딕"/>
+              </a:rPr>
+              <a:t>체크리스트 제출</a:t>
+            </a:r>
+          </a:p>
+        </p:txBody>
+      </p:sp>
+      <p:sp>
+        <p:nvSpPr>
+          <p:cNvPr id="32" name="TextBox 31"/>
+          <p:cNvSpPr txBox="1"/>
+          <p:nvPr/>
+        </p:nvSpPr>
+        <p:spPr>
+          <a:xfrm>
+            <a:off x="457200" y="6528816"/>
+            <a:ext cx="7315200" cy="274320"/>
+          </a:xfrm>
+          <a:prstGeom prst="rect">
+            <a:avLst/>
+          </a:prstGeom>
+          <a:noFill/>
+        </p:spPr>
+        <p:txBody>
+          <a:bodyPr wrap="square">
+            <a:spAutoFit/>
+          </a:bodyPr>
+          <a:lstStyle/>
+          <a:p>
+            <a:pPr algn="l"/>
+            <a:r>
               <a:rPr sz="900" b="0">
                 <a:solidFill>
                   <a:srgbClr val="5B6373"/>
                 </a:solidFill>
                 <a:latin typeface="맑은 고딕"/>
               </a:rPr>
+              <a:t>클라우드인프라관리  ·  7주차 1차시</a:t>
+            </a:r>
+          </a:p>
+        </p:txBody>
+      </p:sp>
+      <p:sp>
+        <p:nvSpPr>
+          <p:cNvPr id="33" name="TextBox 32"/>
+          <p:cNvSpPr txBox="1"/>
+          <p:nvPr/>
+        </p:nvSpPr>
+        <p:spPr>
+          <a:xfrm>
+            <a:off x="10607040" y="6528816"/>
+            <a:ext cx="1188720" cy="274320"/>
+          </a:xfrm>
+          <a:prstGeom prst="rect">
+            <a:avLst/>
+          </a:prstGeom>
+          <a:noFill/>
+        </p:spPr>
+        <p:txBody>
+          <a:bodyPr wrap="square">
+            <a:spAutoFit/>
+          </a:bodyPr>
+          <a:lstStyle/>
+          <a:p>
+            <a:pPr algn="l"/>
+            <a:r>
+              <a:rPr sz="900" b="0">
+                <a:solidFill>
+                  <a:srgbClr val="5B6373"/>
+                </a:solidFill>
+                <a:latin typeface="맑은 고딕"/>
+              </a:rPr>
               <a:t>03 / 12</a:t>
             </a:r>
           </a:p>
@@ -5713,7 +5982,7 @@
       </p:sp>
       <p:sp>
         <p:nvSpPr>
-          <p:cNvPr id="27" name="Rectangle 26"/>
+          <p:cNvPr id="34" name="Rectangle 33"/>
           <p:cNvSpPr/>
           <p:nvPr/>
         </p:nvSpPr>
